--- a/public/videos/repositories/manga-cafe-finder/manga-cafe-finder-tech-preview.pptx
+++ b/public/videos/repositories/manga-cafe-finder/manga-cafe-finder-tech-preview.pptx
@@ -134,7 +134,7 @@
           <p:cNvPr id="2" name="タイトル 1">
             <a:extLst>
               <a:ext uri="{FF2B5EF4-FFF2-40B4-BE49-F238E27FC236}">
-                <a16:creationId xmlns:a16="http://schemas.microsoft.com/office/drawing/2014/main" id="{150E9CAB-6200-CF1C-6510-FBDF42BFC531}"/>
+                <a16:creationId xmlns:a16="http://schemas.microsoft.com/office/drawing/2014/main" id="{A7B60085-5C82-F812-1020-48543DF98E6C}"/>
               </a:ext>
             </a:extLst>
           </p:cNvPr>
@@ -171,7 +171,7 @@
           <p:cNvPr id="3" name="字幕 2">
             <a:extLst>
               <a:ext uri="{FF2B5EF4-FFF2-40B4-BE49-F238E27FC236}">
-                <a16:creationId xmlns:a16="http://schemas.microsoft.com/office/drawing/2014/main" id="{709B7EF6-1431-7442-1FB2-6972502DF35D}"/>
+                <a16:creationId xmlns:a16="http://schemas.microsoft.com/office/drawing/2014/main" id="{3990A7D8-1CC8-1B6E-536A-412D560FB680}"/>
               </a:ext>
             </a:extLst>
           </p:cNvPr>
@@ -241,7 +241,7 @@
           <p:cNvPr id="4" name="日付プレースホルダー 3">
             <a:extLst>
               <a:ext uri="{FF2B5EF4-FFF2-40B4-BE49-F238E27FC236}">
-                <a16:creationId xmlns:a16="http://schemas.microsoft.com/office/drawing/2014/main" id="{1BF53907-09B9-5CFB-702A-90DF1ECDD22E}"/>
+                <a16:creationId xmlns:a16="http://schemas.microsoft.com/office/drawing/2014/main" id="{89D21B83-11DC-7579-26D4-3481B5277AF6}"/>
               </a:ext>
             </a:extLst>
           </p:cNvPr>
@@ -257,7 +257,7 @@
           <a:bodyPr/>
           <a:lstStyle/>
           <a:p>
-            <a:fld id="{C1D8E1FA-081E-4333-8B8D-767F1D810F29}" type="datetimeFigureOut">
+            <a:fld id="{CA11E214-29A8-442E-BC6B-5D970B894DEC}" type="datetimeFigureOut">
               <a:rPr kumimoji="1" lang="ja-JP" altLang="en-US" smtClean="0"/>
               <a:t>2026/7/30</a:t>
             </a:fld>
@@ -270,7 +270,7 @@
           <p:cNvPr id="5" name="フッター プレースホルダー 4">
             <a:extLst>
               <a:ext uri="{FF2B5EF4-FFF2-40B4-BE49-F238E27FC236}">
-                <a16:creationId xmlns:a16="http://schemas.microsoft.com/office/drawing/2014/main" id="{CC9F1C6E-2524-48F2-F52E-B881F1949495}"/>
+                <a16:creationId xmlns:a16="http://schemas.microsoft.com/office/drawing/2014/main" id="{6216786C-AF43-BFF7-DC30-997977E98386}"/>
               </a:ext>
             </a:extLst>
           </p:cNvPr>
@@ -295,7 +295,7 @@
           <p:cNvPr id="6" name="スライド番号プレースホルダー 5">
             <a:extLst>
               <a:ext uri="{FF2B5EF4-FFF2-40B4-BE49-F238E27FC236}">
-                <a16:creationId xmlns:a16="http://schemas.microsoft.com/office/drawing/2014/main" id="{EAF0B364-F3C6-8DA3-F186-7D9D488FBDFD}"/>
+                <a16:creationId xmlns:a16="http://schemas.microsoft.com/office/drawing/2014/main" id="{4A7DCFBD-4A43-B351-B910-BB1D07D95A64}"/>
               </a:ext>
             </a:extLst>
           </p:cNvPr>
@@ -311,7 +311,7 @@
           <a:bodyPr/>
           <a:lstStyle/>
           <a:p>
-            <a:fld id="{C333482F-3083-4A41-B1CB-E251E255648A}" type="slidenum">
+            <a:fld id="{A9A54AD3-59D5-4C20-B285-8F8A94244151}" type="slidenum">
               <a:rPr kumimoji="1" lang="ja-JP" altLang="en-US" smtClean="0"/>
               <a:t>‹#›</a:t>
             </a:fld>
@@ -322,7 +322,7 @@
     </p:spTree>
     <p:extLst>
       <p:ext uri="{BB962C8B-B14F-4D97-AF65-F5344CB8AC3E}">
-        <p14:creationId xmlns:p14="http://schemas.microsoft.com/office/powerpoint/2010/main" val="1221094294"/>
+        <p14:creationId xmlns:p14="http://schemas.microsoft.com/office/powerpoint/2010/main" val="429432074"/>
       </p:ext>
     </p:extLst>
   </p:cSld>
@@ -354,7 +354,7 @@
           <p:cNvPr id="2" name="タイトル 1">
             <a:extLst>
               <a:ext uri="{FF2B5EF4-FFF2-40B4-BE49-F238E27FC236}">
-                <a16:creationId xmlns:a16="http://schemas.microsoft.com/office/drawing/2014/main" id="{C51B0839-4892-6C03-0A61-A5983F28ADE1}"/>
+                <a16:creationId xmlns:a16="http://schemas.microsoft.com/office/drawing/2014/main" id="{C7CEA25E-5950-DC67-64DE-66C54F64F3B6}"/>
               </a:ext>
             </a:extLst>
           </p:cNvPr>
@@ -382,7 +382,7 @@
           <p:cNvPr id="3" name="縦書きテキスト プレースホルダー 2">
             <a:extLst>
               <a:ext uri="{FF2B5EF4-FFF2-40B4-BE49-F238E27FC236}">
-                <a16:creationId xmlns:a16="http://schemas.microsoft.com/office/drawing/2014/main" id="{91C0BBFE-840A-BD3A-FD01-8D698F10374B}"/>
+                <a16:creationId xmlns:a16="http://schemas.microsoft.com/office/drawing/2014/main" id="{85EA89F5-CBF4-93D1-A7F7-70AC29E23101}"/>
               </a:ext>
             </a:extLst>
           </p:cNvPr>
@@ -471,7 +471,7 @@
           <p:cNvPr id="4" name="日付プレースホルダー 3">
             <a:extLst>
               <a:ext uri="{FF2B5EF4-FFF2-40B4-BE49-F238E27FC236}">
-                <a16:creationId xmlns:a16="http://schemas.microsoft.com/office/drawing/2014/main" id="{880E46C2-FFC5-4D7A-E1DE-E2D264DC43E0}"/>
+                <a16:creationId xmlns:a16="http://schemas.microsoft.com/office/drawing/2014/main" id="{A87B2241-50BD-DC3F-0268-673055870717}"/>
               </a:ext>
             </a:extLst>
           </p:cNvPr>
@@ -487,7 +487,7 @@
           <a:bodyPr/>
           <a:lstStyle/>
           <a:p>
-            <a:fld id="{C1D8E1FA-081E-4333-8B8D-767F1D810F29}" type="datetimeFigureOut">
+            <a:fld id="{CA11E214-29A8-442E-BC6B-5D970B894DEC}" type="datetimeFigureOut">
               <a:rPr kumimoji="1" lang="ja-JP" altLang="en-US" smtClean="0"/>
               <a:t>2026/7/30</a:t>
             </a:fld>
@@ -500,7 +500,7 @@
           <p:cNvPr id="5" name="フッター プレースホルダー 4">
             <a:extLst>
               <a:ext uri="{FF2B5EF4-FFF2-40B4-BE49-F238E27FC236}">
-                <a16:creationId xmlns:a16="http://schemas.microsoft.com/office/drawing/2014/main" id="{3CF02A16-C1CD-BB8D-A36F-A8DE5C8BE16D}"/>
+                <a16:creationId xmlns:a16="http://schemas.microsoft.com/office/drawing/2014/main" id="{C9A40630-5F5F-473A-F2DD-6BEDE46E6848}"/>
               </a:ext>
             </a:extLst>
           </p:cNvPr>
@@ -525,7 +525,7 @@
           <p:cNvPr id="6" name="スライド番号プレースホルダー 5">
             <a:extLst>
               <a:ext uri="{FF2B5EF4-FFF2-40B4-BE49-F238E27FC236}">
-                <a16:creationId xmlns:a16="http://schemas.microsoft.com/office/drawing/2014/main" id="{6DCC3E48-E942-8BCC-B21D-9280C85A646E}"/>
+                <a16:creationId xmlns:a16="http://schemas.microsoft.com/office/drawing/2014/main" id="{F0601892-E119-DAFE-26C2-88863E182930}"/>
               </a:ext>
             </a:extLst>
           </p:cNvPr>
@@ -541,7 +541,7 @@
           <a:bodyPr/>
           <a:lstStyle/>
           <a:p>
-            <a:fld id="{C333482F-3083-4A41-B1CB-E251E255648A}" type="slidenum">
+            <a:fld id="{A9A54AD3-59D5-4C20-B285-8F8A94244151}" type="slidenum">
               <a:rPr kumimoji="1" lang="ja-JP" altLang="en-US" smtClean="0"/>
               <a:t>‹#›</a:t>
             </a:fld>
@@ -552,7 +552,7 @@
     </p:spTree>
     <p:extLst>
       <p:ext uri="{BB962C8B-B14F-4D97-AF65-F5344CB8AC3E}">
-        <p14:creationId xmlns:p14="http://schemas.microsoft.com/office/powerpoint/2010/main" val="3141002083"/>
+        <p14:creationId xmlns:p14="http://schemas.microsoft.com/office/powerpoint/2010/main" val="3186231937"/>
       </p:ext>
     </p:extLst>
   </p:cSld>
@@ -584,7 +584,7 @@
           <p:cNvPr id="2" name="縦書きタイトル 1">
             <a:extLst>
               <a:ext uri="{FF2B5EF4-FFF2-40B4-BE49-F238E27FC236}">
-                <a16:creationId xmlns:a16="http://schemas.microsoft.com/office/drawing/2014/main" id="{695BA077-A54B-F736-21B5-F5DC9581312B}"/>
+                <a16:creationId xmlns:a16="http://schemas.microsoft.com/office/drawing/2014/main" id="{699FC0B2-3C47-6F95-0263-0F0A6817C602}"/>
               </a:ext>
             </a:extLst>
           </p:cNvPr>
@@ -617,7 +617,7 @@
           <p:cNvPr id="3" name="縦書きテキスト プレースホルダー 2">
             <a:extLst>
               <a:ext uri="{FF2B5EF4-FFF2-40B4-BE49-F238E27FC236}">
-                <a16:creationId xmlns:a16="http://schemas.microsoft.com/office/drawing/2014/main" id="{FCE5504C-FD6C-4327-D154-9684ED9C076E}"/>
+                <a16:creationId xmlns:a16="http://schemas.microsoft.com/office/drawing/2014/main" id="{2042FEE7-D638-4DDF-42E4-D0CB99744864}"/>
               </a:ext>
             </a:extLst>
           </p:cNvPr>
@@ -711,7 +711,7 @@
           <p:cNvPr id="4" name="日付プレースホルダー 3">
             <a:extLst>
               <a:ext uri="{FF2B5EF4-FFF2-40B4-BE49-F238E27FC236}">
-                <a16:creationId xmlns:a16="http://schemas.microsoft.com/office/drawing/2014/main" id="{5D49C801-5859-9E6A-F99A-1A54C475584E}"/>
+                <a16:creationId xmlns:a16="http://schemas.microsoft.com/office/drawing/2014/main" id="{2F33EF3A-C493-8007-43FD-F4E5615DEA61}"/>
               </a:ext>
             </a:extLst>
           </p:cNvPr>
@@ -727,7 +727,7 @@
           <a:bodyPr/>
           <a:lstStyle/>
           <a:p>
-            <a:fld id="{C1D8E1FA-081E-4333-8B8D-767F1D810F29}" type="datetimeFigureOut">
+            <a:fld id="{CA11E214-29A8-442E-BC6B-5D970B894DEC}" type="datetimeFigureOut">
               <a:rPr kumimoji="1" lang="ja-JP" altLang="en-US" smtClean="0"/>
               <a:t>2026/7/30</a:t>
             </a:fld>
@@ -740,7 +740,7 @@
           <p:cNvPr id="5" name="フッター プレースホルダー 4">
             <a:extLst>
               <a:ext uri="{FF2B5EF4-FFF2-40B4-BE49-F238E27FC236}">
-                <a16:creationId xmlns:a16="http://schemas.microsoft.com/office/drawing/2014/main" id="{9D242D23-9D50-2CE8-879E-FBA042D43803}"/>
+                <a16:creationId xmlns:a16="http://schemas.microsoft.com/office/drawing/2014/main" id="{9673768B-B1A3-C385-A413-856A21FD0316}"/>
               </a:ext>
             </a:extLst>
           </p:cNvPr>
@@ -765,7 +765,7 @@
           <p:cNvPr id="6" name="スライド番号プレースホルダー 5">
             <a:extLst>
               <a:ext uri="{FF2B5EF4-FFF2-40B4-BE49-F238E27FC236}">
-                <a16:creationId xmlns:a16="http://schemas.microsoft.com/office/drawing/2014/main" id="{BD3FC3DE-20BB-9C91-1463-AF4EFAF122DC}"/>
+                <a16:creationId xmlns:a16="http://schemas.microsoft.com/office/drawing/2014/main" id="{5EAC0BC7-C281-4A31-E136-16ACEB4D900E}"/>
               </a:ext>
             </a:extLst>
           </p:cNvPr>
@@ -781,7 +781,7 @@
           <a:bodyPr/>
           <a:lstStyle/>
           <a:p>
-            <a:fld id="{C333482F-3083-4A41-B1CB-E251E255648A}" type="slidenum">
+            <a:fld id="{A9A54AD3-59D5-4C20-B285-8F8A94244151}" type="slidenum">
               <a:rPr kumimoji="1" lang="ja-JP" altLang="en-US" smtClean="0"/>
               <a:t>‹#›</a:t>
             </a:fld>
@@ -792,7 +792,7 @@
     </p:spTree>
     <p:extLst>
       <p:ext uri="{BB962C8B-B14F-4D97-AF65-F5344CB8AC3E}">
-        <p14:creationId xmlns:p14="http://schemas.microsoft.com/office/powerpoint/2010/main" val="2315441657"/>
+        <p14:creationId xmlns:p14="http://schemas.microsoft.com/office/powerpoint/2010/main" val="3946893089"/>
       </p:ext>
     </p:extLst>
   </p:cSld>
@@ -824,7 +824,7 @@
           <p:cNvPr id="2" name="タイトル 1">
             <a:extLst>
               <a:ext uri="{FF2B5EF4-FFF2-40B4-BE49-F238E27FC236}">
-                <a16:creationId xmlns:a16="http://schemas.microsoft.com/office/drawing/2014/main" id="{62C4183C-2D15-172D-9F52-8B257BCDDE19}"/>
+                <a16:creationId xmlns:a16="http://schemas.microsoft.com/office/drawing/2014/main" id="{8D362377-301F-2A68-22C4-722185DD6BC9}"/>
               </a:ext>
             </a:extLst>
           </p:cNvPr>
@@ -852,7 +852,7 @@
           <p:cNvPr id="3" name="コンテンツ プレースホルダー 2">
             <a:extLst>
               <a:ext uri="{FF2B5EF4-FFF2-40B4-BE49-F238E27FC236}">
-                <a16:creationId xmlns:a16="http://schemas.microsoft.com/office/drawing/2014/main" id="{00439E10-4372-52B1-0A9B-7F78537FAD82}"/>
+                <a16:creationId xmlns:a16="http://schemas.microsoft.com/office/drawing/2014/main" id="{1E33A219-6637-4B8F-84AA-989A89A8BB4F}"/>
               </a:ext>
             </a:extLst>
           </p:cNvPr>
@@ -941,7 +941,7 @@
           <p:cNvPr id="4" name="日付プレースホルダー 3">
             <a:extLst>
               <a:ext uri="{FF2B5EF4-FFF2-40B4-BE49-F238E27FC236}">
-                <a16:creationId xmlns:a16="http://schemas.microsoft.com/office/drawing/2014/main" id="{CE4D1C58-94E6-D02D-02F3-505511132E4B}"/>
+                <a16:creationId xmlns:a16="http://schemas.microsoft.com/office/drawing/2014/main" id="{F371210C-E206-AB77-3B36-DECF64817186}"/>
               </a:ext>
             </a:extLst>
           </p:cNvPr>
@@ -957,7 +957,7 @@
           <a:bodyPr/>
           <a:lstStyle/>
           <a:p>
-            <a:fld id="{C1D8E1FA-081E-4333-8B8D-767F1D810F29}" type="datetimeFigureOut">
+            <a:fld id="{CA11E214-29A8-442E-BC6B-5D970B894DEC}" type="datetimeFigureOut">
               <a:rPr kumimoji="1" lang="ja-JP" altLang="en-US" smtClean="0"/>
               <a:t>2026/7/30</a:t>
             </a:fld>
@@ -970,7 +970,7 @@
           <p:cNvPr id="5" name="フッター プレースホルダー 4">
             <a:extLst>
               <a:ext uri="{FF2B5EF4-FFF2-40B4-BE49-F238E27FC236}">
-                <a16:creationId xmlns:a16="http://schemas.microsoft.com/office/drawing/2014/main" id="{40BC56B6-1C11-EBD5-ABF3-1A6BA4E0A07B}"/>
+                <a16:creationId xmlns:a16="http://schemas.microsoft.com/office/drawing/2014/main" id="{B5D47629-25BA-9F37-CA5A-DC2F89E3F5EB}"/>
               </a:ext>
             </a:extLst>
           </p:cNvPr>
@@ -995,7 +995,7 @@
           <p:cNvPr id="6" name="スライド番号プレースホルダー 5">
             <a:extLst>
               <a:ext uri="{FF2B5EF4-FFF2-40B4-BE49-F238E27FC236}">
-                <a16:creationId xmlns:a16="http://schemas.microsoft.com/office/drawing/2014/main" id="{9D8285DB-E675-02EB-7EE7-E7EA5FE169C0}"/>
+                <a16:creationId xmlns:a16="http://schemas.microsoft.com/office/drawing/2014/main" id="{0FCE5D60-C5CD-D53A-949B-3B234B709513}"/>
               </a:ext>
             </a:extLst>
           </p:cNvPr>
@@ -1011,7 +1011,7 @@
           <a:bodyPr/>
           <a:lstStyle/>
           <a:p>
-            <a:fld id="{C333482F-3083-4A41-B1CB-E251E255648A}" type="slidenum">
+            <a:fld id="{A9A54AD3-59D5-4C20-B285-8F8A94244151}" type="slidenum">
               <a:rPr kumimoji="1" lang="ja-JP" altLang="en-US" smtClean="0"/>
               <a:t>‹#›</a:t>
             </a:fld>
@@ -1022,7 +1022,7 @@
     </p:spTree>
     <p:extLst>
       <p:ext uri="{BB962C8B-B14F-4D97-AF65-F5344CB8AC3E}">
-        <p14:creationId xmlns:p14="http://schemas.microsoft.com/office/powerpoint/2010/main" val="1659469867"/>
+        <p14:creationId xmlns:p14="http://schemas.microsoft.com/office/powerpoint/2010/main" val="1764593467"/>
       </p:ext>
     </p:extLst>
   </p:cSld>
@@ -1054,7 +1054,7 @@
           <p:cNvPr id="2" name="タイトル 1">
             <a:extLst>
               <a:ext uri="{FF2B5EF4-FFF2-40B4-BE49-F238E27FC236}">
-                <a16:creationId xmlns:a16="http://schemas.microsoft.com/office/drawing/2014/main" id="{6FE43036-E383-A3CF-C4E3-52A7BE3D96F6}"/>
+                <a16:creationId xmlns:a16="http://schemas.microsoft.com/office/drawing/2014/main" id="{E617D661-DBC3-43DE-67E7-70ECF166A812}"/>
               </a:ext>
             </a:extLst>
           </p:cNvPr>
@@ -1091,7 +1091,7 @@
           <p:cNvPr id="3" name="テキスト プレースホルダー 2">
             <a:extLst>
               <a:ext uri="{FF2B5EF4-FFF2-40B4-BE49-F238E27FC236}">
-                <a16:creationId xmlns:a16="http://schemas.microsoft.com/office/drawing/2014/main" id="{A8D151EF-A78B-BE2B-D414-335C8BCE539B}"/>
+                <a16:creationId xmlns:a16="http://schemas.microsoft.com/office/drawing/2014/main" id="{90DF12C3-2DF6-527A-ABA4-B30B5A97EC7E}"/>
               </a:ext>
             </a:extLst>
           </p:cNvPr>
@@ -1216,7 +1216,7 @@
           <p:cNvPr id="4" name="日付プレースホルダー 3">
             <a:extLst>
               <a:ext uri="{FF2B5EF4-FFF2-40B4-BE49-F238E27FC236}">
-                <a16:creationId xmlns:a16="http://schemas.microsoft.com/office/drawing/2014/main" id="{F499A3EB-680C-A71B-37B9-EDEA692C4160}"/>
+                <a16:creationId xmlns:a16="http://schemas.microsoft.com/office/drawing/2014/main" id="{40A0C336-EBE6-6A42-D048-840088351817}"/>
               </a:ext>
             </a:extLst>
           </p:cNvPr>
@@ -1232,7 +1232,7 @@
           <a:bodyPr/>
           <a:lstStyle/>
           <a:p>
-            <a:fld id="{C1D8E1FA-081E-4333-8B8D-767F1D810F29}" type="datetimeFigureOut">
+            <a:fld id="{CA11E214-29A8-442E-BC6B-5D970B894DEC}" type="datetimeFigureOut">
               <a:rPr kumimoji="1" lang="ja-JP" altLang="en-US" smtClean="0"/>
               <a:t>2026/7/30</a:t>
             </a:fld>
@@ -1245,7 +1245,7 @@
           <p:cNvPr id="5" name="フッター プレースホルダー 4">
             <a:extLst>
               <a:ext uri="{FF2B5EF4-FFF2-40B4-BE49-F238E27FC236}">
-                <a16:creationId xmlns:a16="http://schemas.microsoft.com/office/drawing/2014/main" id="{EDAA2CB9-C500-0D2C-9CCA-406390D318DB}"/>
+                <a16:creationId xmlns:a16="http://schemas.microsoft.com/office/drawing/2014/main" id="{9409C3C5-49E6-BAA8-6376-F59962B46B5D}"/>
               </a:ext>
             </a:extLst>
           </p:cNvPr>
@@ -1270,7 +1270,7 @@
           <p:cNvPr id="6" name="スライド番号プレースホルダー 5">
             <a:extLst>
               <a:ext uri="{FF2B5EF4-FFF2-40B4-BE49-F238E27FC236}">
-                <a16:creationId xmlns:a16="http://schemas.microsoft.com/office/drawing/2014/main" id="{C3E32161-8943-8EFE-8457-9795981C4863}"/>
+                <a16:creationId xmlns:a16="http://schemas.microsoft.com/office/drawing/2014/main" id="{DCE25D9D-0ABC-B9C1-A6BB-6C814EFECCBC}"/>
               </a:ext>
             </a:extLst>
           </p:cNvPr>
@@ -1286,7 +1286,7 @@
           <a:bodyPr/>
           <a:lstStyle/>
           <a:p>
-            <a:fld id="{C333482F-3083-4A41-B1CB-E251E255648A}" type="slidenum">
+            <a:fld id="{A9A54AD3-59D5-4C20-B285-8F8A94244151}" type="slidenum">
               <a:rPr kumimoji="1" lang="ja-JP" altLang="en-US" smtClean="0"/>
               <a:t>‹#›</a:t>
             </a:fld>
@@ -1297,7 +1297,7 @@
     </p:spTree>
     <p:extLst>
       <p:ext uri="{BB962C8B-B14F-4D97-AF65-F5344CB8AC3E}">
-        <p14:creationId xmlns:p14="http://schemas.microsoft.com/office/powerpoint/2010/main" val="3448703777"/>
+        <p14:creationId xmlns:p14="http://schemas.microsoft.com/office/powerpoint/2010/main" val="3345296367"/>
       </p:ext>
     </p:extLst>
   </p:cSld>
@@ -1329,7 +1329,7 @@
           <p:cNvPr id="2" name="タイトル 1">
             <a:extLst>
               <a:ext uri="{FF2B5EF4-FFF2-40B4-BE49-F238E27FC236}">
-                <a16:creationId xmlns:a16="http://schemas.microsoft.com/office/drawing/2014/main" id="{B0203716-B018-13D6-2A63-2CDE11524F58}"/>
+                <a16:creationId xmlns:a16="http://schemas.microsoft.com/office/drawing/2014/main" id="{B56F32CD-8FDE-C318-8DAE-9D06C2A0FE5D}"/>
               </a:ext>
             </a:extLst>
           </p:cNvPr>
@@ -1357,7 +1357,7 @@
           <p:cNvPr id="3" name="コンテンツ プレースホルダー 2">
             <a:extLst>
               <a:ext uri="{FF2B5EF4-FFF2-40B4-BE49-F238E27FC236}">
-                <a16:creationId xmlns:a16="http://schemas.microsoft.com/office/drawing/2014/main" id="{1A03FEEF-717A-2815-CF3A-53133AB6E2CE}"/>
+                <a16:creationId xmlns:a16="http://schemas.microsoft.com/office/drawing/2014/main" id="{37D74CA1-FF0D-57D3-33D0-0890E8490CB5}"/>
               </a:ext>
             </a:extLst>
           </p:cNvPr>
@@ -1451,7 +1451,7 @@
           <p:cNvPr id="4" name="コンテンツ プレースホルダー 3">
             <a:extLst>
               <a:ext uri="{FF2B5EF4-FFF2-40B4-BE49-F238E27FC236}">
-                <a16:creationId xmlns:a16="http://schemas.microsoft.com/office/drawing/2014/main" id="{9F50F789-1AB9-DADB-0C8F-45691B3AEB28}"/>
+                <a16:creationId xmlns:a16="http://schemas.microsoft.com/office/drawing/2014/main" id="{7823FB4B-4F46-A99E-CCC6-28F41B2F059D}"/>
               </a:ext>
             </a:extLst>
           </p:cNvPr>
@@ -1545,7 +1545,7 @@
           <p:cNvPr id="5" name="日付プレースホルダー 4">
             <a:extLst>
               <a:ext uri="{FF2B5EF4-FFF2-40B4-BE49-F238E27FC236}">
-                <a16:creationId xmlns:a16="http://schemas.microsoft.com/office/drawing/2014/main" id="{1671C6FD-A8E9-8E3B-1E6E-AE10DB2F390D}"/>
+                <a16:creationId xmlns:a16="http://schemas.microsoft.com/office/drawing/2014/main" id="{980B7F37-CE54-DA85-D54C-97D374351D5D}"/>
               </a:ext>
             </a:extLst>
           </p:cNvPr>
@@ -1561,7 +1561,7 @@
           <a:bodyPr/>
           <a:lstStyle/>
           <a:p>
-            <a:fld id="{C1D8E1FA-081E-4333-8B8D-767F1D810F29}" type="datetimeFigureOut">
+            <a:fld id="{CA11E214-29A8-442E-BC6B-5D970B894DEC}" type="datetimeFigureOut">
               <a:rPr kumimoji="1" lang="ja-JP" altLang="en-US" smtClean="0"/>
               <a:t>2026/7/30</a:t>
             </a:fld>
@@ -1574,7 +1574,7 @@
           <p:cNvPr id="6" name="フッター プレースホルダー 5">
             <a:extLst>
               <a:ext uri="{FF2B5EF4-FFF2-40B4-BE49-F238E27FC236}">
-                <a16:creationId xmlns:a16="http://schemas.microsoft.com/office/drawing/2014/main" id="{25AD05C6-5981-79D4-8B0B-8581930B3CEC}"/>
+                <a16:creationId xmlns:a16="http://schemas.microsoft.com/office/drawing/2014/main" id="{C07A5015-1FA9-BDF5-8666-4433CBC9D48E}"/>
               </a:ext>
             </a:extLst>
           </p:cNvPr>
@@ -1599,7 +1599,7 @@
           <p:cNvPr id="7" name="スライド番号プレースホルダー 6">
             <a:extLst>
               <a:ext uri="{FF2B5EF4-FFF2-40B4-BE49-F238E27FC236}">
-                <a16:creationId xmlns:a16="http://schemas.microsoft.com/office/drawing/2014/main" id="{0D325E2C-FBAD-461D-6E09-A35111E3F272}"/>
+                <a16:creationId xmlns:a16="http://schemas.microsoft.com/office/drawing/2014/main" id="{04B30468-9F50-B58D-CF47-6E406507EBAB}"/>
               </a:ext>
             </a:extLst>
           </p:cNvPr>
@@ -1615,7 +1615,7 @@
           <a:bodyPr/>
           <a:lstStyle/>
           <a:p>
-            <a:fld id="{C333482F-3083-4A41-B1CB-E251E255648A}" type="slidenum">
+            <a:fld id="{A9A54AD3-59D5-4C20-B285-8F8A94244151}" type="slidenum">
               <a:rPr kumimoji="1" lang="ja-JP" altLang="en-US" smtClean="0"/>
               <a:t>‹#›</a:t>
             </a:fld>
@@ -1626,7 +1626,7 @@
     </p:spTree>
     <p:extLst>
       <p:ext uri="{BB962C8B-B14F-4D97-AF65-F5344CB8AC3E}">
-        <p14:creationId xmlns:p14="http://schemas.microsoft.com/office/powerpoint/2010/main" val="3424634438"/>
+        <p14:creationId xmlns:p14="http://schemas.microsoft.com/office/powerpoint/2010/main" val="311863063"/>
       </p:ext>
     </p:extLst>
   </p:cSld>
@@ -1658,7 +1658,7 @@
           <p:cNvPr id="2" name="タイトル 1">
             <a:extLst>
               <a:ext uri="{FF2B5EF4-FFF2-40B4-BE49-F238E27FC236}">
-                <a16:creationId xmlns:a16="http://schemas.microsoft.com/office/drawing/2014/main" id="{D375980E-DB22-96E7-A952-8D17FF17DD11}"/>
+                <a16:creationId xmlns:a16="http://schemas.microsoft.com/office/drawing/2014/main" id="{9795C96E-3616-1308-0C36-F9D04C7B33E3}"/>
               </a:ext>
             </a:extLst>
           </p:cNvPr>
@@ -1691,7 +1691,7 @@
           <p:cNvPr id="3" name="テキスト プレースホルダー 2">
             <a:extLst>
               <a:ext uri="{FF2B5EF4-FFF2-40B4-BE49-F238E27FC236}">
-                <a16:creationId xmlns:a16="http://schemas.microsoft.com/office/drawing/2014/main" id="{8BEADCDA-5973-D23E-EB9F-75D58A134484}"/>
+                <a16:creationId xmlns:a16="http://schemas.microsoft.com/office/drawing/2014/main" id="{800D2DF4-2E75-520A-78CD-42CF34EC3EC8}"/>
               </a:ext>
             </a:extLst>
           </p:cNvPr>
@@ -1762,7 +1762,7 @@
           <p:cNvPr id="4" name="コンテンツ プレースホルダー 3">
             <a:extLst>
               <a:ext uri="{FF2B5EF4-FFF2-40B4-BE49-F238E27FC236}">
-                <a16:creationId xmlns:a16="http://schemas.microsoft.com/office/drawing/2014/main" id="{4EC330F3-46DD-DCC5-8335-24B3BF7E35E7}"/>
+                <a16:creationId xmlns:a16="http://schemas.microsoft.com/office/drawing/2014/main" id="{085A1A3E-C8B1-FC59-596C-1C8DD8C04805}"/>
               </a:ext>
             </a:extLst>
           </p:cNvPr>
@@ -1856,7 +1856,7 @@
           <p:cNvPr id="5" name="テキスト プレースホルダー 4">
             <a:extLst>
               <a:ext uri="{FF2B5EF4-FFF2-40B4-BE49-F238E27FC236}">
-                <a16:creationId xmlns:a16="http://schemas.microsoft.com/office/drawing/2014/main" id="{830F7AAF-060F-BDE1-BB01-2AB5F031C73D}"/>
+                <a16:creationId xmlns:a16="http://schemas.microsoft.com/office/drawing/2014/main" id="{209A2649-8EEB-6128-C318-3588AB58F65B}"/>
               </a:ext>
             </a:extLst>
           </p:cNvPr>
@@ -1927,7 +1927,7 @@
           <p:cNvPr id="6" name="コンテンツ プレースホルダー 5">
             <a:extLst>
               <a:ext uri="{FF2B5EF4-FFF2-40B4-BE49-F238E27FC236}">
-                <a16:creationId xmlns:a16="http://schemas.microsoft.com/office/drawing/2014/main" id="{EF6C044E-71DF-C401-689D-2715F4BF886B}"/>
+                <a16:creationId xmlns:a16="http://schemas.microsoft.com/office/drawing/2014/main" id="{15612946-4A53-152C-2030-15899B9CCF4E}"/>
               </a:ext>
             </a:extLst>
           </p:cNvPr>
@@ -2021,7 +2021,7 @@
           <p:cNvPr id="7" name="日付プレースホルダー 6">
             <a:extLst>
               <a:ext uri="{FF2B5EF4-FFF2-40B4-BE49-F238E27FC236}">
-                <a16:creationId xmlns:a16="http://schemas.microsoft.com/office/drawing/2014/main" id="{5009514C-7FFF-760D-C15E-27DE88AE848E}"/>
+                <a16:creationId xmlns:a16="http://schemas.microsoft.com/office/drawing/2014/main" id="{9B1E8CE2-0026-E920-89E2-74660D255D50}"/>
               </a:ext>
             </a:extLst>
           </p:cNvPr>
@@ -2037,7 +2037,7 @@
           <a:bodyPr/>
           <a:lstStyle/>
           <a:p>
-            <a:fld id="{C1D8E1FA-081E-4333-8B8D-767F1D810F29}" type="datetimeFigureOut">
+            <a:fld id="{CA11E214-29A8-442E-BC6B-5D970B894DEC}" type="datetimeFigureOut">
               <a:rPr kumimoji="1" lang="ja-JP" altLang="en-US" smtClean="0"/>
               <a:t>2026/7/30</a:t>
             </a:fld>
@@ -2050,7 +2050,7 @@
           <p:cNvPr id="8" name="フッター プレースホルダー 7">
             <a:extLst>
               <a:ext uri="{FF2B5EF4-FFF2-40B4-BE49-F238E27FC236}">
-                <a16:creationId xmlns:a16="http://schemas.microsoft.com/office/drawing/2014/main" id="{7B93EEF5-CBC1-97C5-86B8-8E56108FA5AC}"/>
+                <a16:creationId xmlns:a16="http://schemas.microsoft.com/office/drawing/2014/main" id="{2EE4CA3B-00D9-8B4D-C85C-9EC34D462C92}"/>
               </a:ext>
             </a:extLst>
           </p:cNvPr>
@@ -2075,7 +2075,7 @@
           <p:cNvPr id="9" name="スライド番号プレースホルダー 8">
             <a:extLst>
               <a:ext uri="{FF2B5EF4-FFF2-40B4-BE49-F238E27FC236}">
-                <a16:creationId xmlns:a16="http://schemas.microsoft.com/office/drawing/2014/main" id="{9ED08EB9-77C6-D172-0262-D8F7D245EB1B}"/>
+                <a16:creationId xmlns:a16="http://schemas.microsoft.com/office/drawing/2014/main" id="{94930BC2-CD0D-95E0-196B-BF1C9BC43BFE}"/>
               </a:ext>
             </a:extLst>
           </p:cNvPr>
@@ -2091,7 +2091,7 @@
           <a:bodyPr/>
           <a:lstStyle/>
           <a:p>
-            <a:fld id="{C333482F-3083-4A41-B1CB-E251E255648A}" type="slidenum">
+            <a:fld id="{A9A54AD3-59D5-4C20-B285-8F8A94244151}" type="slidenum">
               <a:rPr kumimoji="1" lang="ja-JP" altLang="en-US" smtClean="0"/>
               <a:t>‹#›</a:t>
             </a:fld>
@@ -2102,7 +2102,7 @@
     </p:spTree>
     <p:extLst>
       <p:ext uri="{BB962C8B-B14F-4D97-AF65-F5344CB8AC3E}">
-        <p14:creationId xmlns:p14="http://schemas.microsoft.com/office/powerpoint/2010/main" val="3916315720"/>
+        <p14:creationId xmlns:p14="http://schemas.microsoft.com/office/powerpoint/2010/main" val="2300247411"/>
       </p:ext>
     </p:extLst>
   </p:cSld>
@@ -2134,7 +2134,7 @@
           <p:cNvPr id="2" name="タイトル 1">
             <a:extLst>
               <a:ext uri="{FF2B5EF4-FFF2-40B4-BE49-F238E27FC236}">
-                <a16:creationId xmlns:a16="http://schemas.microsoft.com/office/drawing/2014/main" id="{1CDC9734-9A57-B01E-D945-E9F2BAADFD26}"/>
+                <a16:creationId xmlns:a16="http://schemas.microsoft.com/office/drawing/2014/main" id="{1F55CC66-8AD7-8F5A-53F1-195B6EA2BF2C}"/>
               </a:ext>
             </a:extLst>
           </p:cNvPr>
@@ -2162,7 +2162,7 @@
           <p:cNvPr id="3" name="日付プレースホルダー 2">
             <a:extLst>
               <a:ext uri="{FF2B5EF4-FFF2-40B4-BE49-F238E27FC236}">
-                <a16:creationId xmlns:a16="http://schemas.microsoft.com/office/drawing/2014/main" id="{E3338319-6D46-10ED-BCB0-46F78421892B}"/>
+                <a16:creationId xmlns:a16="http://schemas.microsoft.com/office/drawing/2014/main" id="{34CF9BA8-5846-68CB-BED1-D61AE212D0F3}"/>
               </a:ext>
             </a:extLst>
           </p:cNvPr>
@@ -2178,7 +2178,7 @@
           <a:bodyPr/>
           <a:lstStyle/>
           <a:p>
-            <a:fld id="{C1D8E1FA-081E-4333-8B8D-767F1D810F29}" type="datetimeFigureOut">
+            <a:fld id="{CA11E214-29A8-442E-BC6B-5D970B894DEC}" type="datetimeFigureOut">
               <a:rPr kumimoji="1" lang="ja-JP" altLang="en-US" smtClean="0"/>
               <a:t>2026/7/30</a:t>
             </a:fld>
@@ -2191,7 +2191,7 @@
           <p:cNvPr id="4" name="フッター プレースホルダー 3">
             <a:extLst>
               <a:ext uri="{FF2B5EF4-FFF2-40B4-BE49-F238E27FC236}">
-                <a16:creationId xmlns:a16="http://schemas.microsoft.com/office/drawing/2014/main" id="{D29B7CB2-3217-8352-084C-D584E0639BDF}"/>
+                <a16:creationId xmlns:a16="http://schemas.microsoft.com/office/drawing/2014/main" id="{6644E651-00F3-1C9F-EB58-8994A85E69A1}"/>
               </a:ext>
             </a:extLst>
           </p:cNvPr>
@@ -2216,7 +2216,7 @@
           <p:cNvPr id="5" name="スライド番号プレースホルダー 4">
             <a:extLst>
               <a:ext uri="{FF2B5EF4-FFF2-40B4-BE49-F238E27FC236}">
-                <a16:creationId xmlns:a16="http://schemas.microsoft.com/office/drawing/2014/main" id="{D55B7D56-2A19-10F8-88DD-6822C74B3A49}"/>
+                <a16:creationId xmlns:a16="http://schemas.microsoft.com/office/drawing/2014/main" id="{9B629EBB-92B9-E9D4-965A-221911E5F7BF}"/>
               </a:ext>
             </a:extLst>
           </p:cNvPr>
@@ -2232,7 +2232,7 @@
           <a:bodyPr/>
           <a:lstStyle/>
           <a:p>
-            <a:fld id="{C333482F-3083-4A41-B1CB-E251E255648A}" type="slidenum">
+            <a:fld id="{A9A54AD3-59D5-4C20-B285-8F8A94244151}" type="slidenum">
               <a:rPr kumimoji="1" lang="ja-JP" altLang="en-US" smtClean="0"/>
               <a:t>‹#›</a:t>
             </a:fld>
@@ -2243,7 +2243,7 @@
     </p:spTree>
     <p:extLst>
       <p:ext uri="{BB962C8B-B14F-4D97-AF65-F5344CB8AC3E}">
-        <p14:creationId xmlns:p14="http://schemas.microsoft.com/office/powerpoint/2010/main" val="4177241769"/>
+        <p14:creationId xmlns:p14="http://schemas.microsoft.com/office/powerpoint/2010/main" val="367827652"/>
       </p:ext>
     </p:extLst>
   </p:cSld>
@@ -2275,7 +2275,7 @@
           <p:cNvPr id="2" name="日付プレースホルダー 1">
             <a:extLst>
               <a:ext uri="{FF2B5EF4-FFF2-40B4-BE49-F238E27FC236}">
-                <a16:creationId xmlns:a16="http://schemas.microsoft.com/office/drawing/2014/main" id="{607762A5-B809-5E13-C3DB-169C83A039D3}"/>
+                <a16:creationId xmlns:a16="http://schemas.microsoft.com/office/drawing/2014/main" id="{C993F957-40E1-F198-D485-2227A8258255}"/>
               </a:ext>
             </a:extLst>
           </p:cNvPr>
@@ -2291,7 +2291,7 @@
           <a:bodyPr/>
           <a:lstStyle/>
           <a:p>
-            <a:fld id="{C1D8E1FA-081E-4333-8B8D-767F1D810F29}" type="datetimeFigureOut">
+            <a:fld id="{CA11E214-29A8-442E-BC6B-5D970B894DEC}" type="datetimeFigureOut">
               <a:rPr kumimoji="1" lang="ja-JP" altLang="en-US" smtClean="0"/>
               <a:t>2026/7/30</a:t>
             </a:fld>
@@ -2304,7 +2304,7 @@
           <p:cNvPr id="3" name="フッター プレースホルダー 2">
             <a:extLst>
               <a:ext uri="{FF2B5EF4-FFF2-40B4-BE49-F238E27FC236}">
-                <a16:creationId xmlns:a16="http://schemas.microsoft.com/office/drawing/2014/main" id="{77D5AB58-8881-9B3F-0563-D651394CFF03}"/>
+                <a16:creationId xmlns:a16="http://schemas.microsoft.com/office/drawing/2014/main" id="{E391D466-17C1-9C2C-5466-72669A90130B}"/>
               </a:ext>
             </a:extLst>
           </p:cNvPr>
@@ -2329,7 +2329,7 @@
           <p:cNvPr id="4" name="スライド番号プレースホルダー 3">
             <a:extLst>
               <a:ext uri="{FF2B5EF4-FFF2-40B4-BE49-F238E27FC236}">
-                <a16:creationId xmlns:a16="http://schemas.microsoft.com/office/drawing/2014/main" id="{4CD8AAE7-6D79-547D-C28A-6361693E3F85}"/>
+                <a16:creationId xmlns:a16="http://schemas.microsoft.com/office/drawing/2014/main" id="{308470B5-24A1-23B6-4813-18669B0B4EFC}"/>
               </a:ext>
             </a:extLst>
           </p:cNvPr>
@@ -2345,7 +2345,7 @@
           <a:bodyPr/>
           <a:lstStyle/>
           <a:p>
-            <a:fld id="{C333482F-3083-4A41-B1CB-E251E255648A}" type="slidenum">
+            <a:fld id="{A9A54AD3-59D5-4C20-B285-8F8A94244151}" type="slidenum">
               <a:rPr kumimoji="1" lang="ja-JP" altLang="en-US" smtClean="0"/>
               <a:t>‹#›</a:t>
             </a:fld>
@@ -2356,7 +2356,7 @@
     </p:spTree>
     <p:extLst>
       <p:ext uri="{BB962C8B-B14F-4D97-AF65-F5344CB8AC3E}">
-        <p14:creationId xmlns:p14="http://schemas.microsoft.com/office/powerpoint/2010/main" val="606675914"/>
+        <p14:creationId xmlns:p14="http://schemas.microsoft.com/office/powerpoint/2010/main" val="607482225"/>
       </p:ext>
     </p:extLst>
   </p:cSld>
@@ -2388,7 +2388,7 @@
           <p:cNvPr id="2" name="タイトル 1">
             <a:extLst>
               <a:ext uri="{FF2B5EF4-FFF2-40B4-BE49-F238E27FC236}">
-                <a16:creationId xmlns:a16="http://schemas.microsoft.com/office/drawing/2014/main" id="{C93B3EB2-7B25-2077-C660-52104151B037}"/>
+                <a16:creationId xmlns:a16="http://schemas.microsoft.com/office/drawing/2014/main" id="{DE7AA30C-419B-EC8D-7EB4-DBA73A197FB1}"/>
               </a:ext>
             </a:extLst>
           </p:cNvPr>
@@ -2425,7 +2425,7 @@
           <p:cNvPr id="3" name="コンテンツ プレースホルダー 2">
             <a:extLst>
               <a:ext uri="{FF2B5EF4-FFF2-40B4-BE49-F238E27FC236}">
-                <a16:creationId xmlns:a16="http://schemas.microsoft.com/office/drawing/2014/main" id="{E4FCC9A1-4440-DE42-2BE8-B4FB50A2D9A0}"/>
+                <a16:creationId xmlns:a16="http://schemas.microsoft.com/office/drawing/2014/main" id="{4B07FD7F-7B02-CE1E-8934-5C38FCDBD990}"/>
               </a:ext>
             </a:extLst>
           </p:cNvPr>
@@ -2547,7 +2547,7 @@
           <p:cNvPr id="4" name="テキスト プレースホルダー 3">
             <a:extLst>
               <a:ext uri="{FF2B5EF4-FFF2-40B4-BE49-F238E27FC236}">
-                <a16:creationId xmlns:a16="http://schemas.microsoft.com/office/drawing/2014/main" id="{5D4C5A9A-63B3-019A-2085-E46C5DCD60CF}"/>
+                <a16:creationId xmlns:a16="http://schemas.microsoft.com/office/drawing/2014/main" id="{7E9ACC6F-F51C-3F31-9BD9-63D1BC3B5E8E}"/>
               </a:ext>
             </a:extLst>
           </p:cNvPr>
@@ -2618,7 +2618,7 @@
           <p:cNvPr id="5" name="日付プレースホルダー 4">
             <a:extLst>
               <a:ext uri="{FF2B5EF4-FFF2-40B4-BE49-F238E27FC236}">
-                <a16:creationId xmlns:a16="http://schemas.microsoft.com/office/drawing/2014/main" id="{A71BD665-7E6F-F037-9717-5B25B7EB13EB}"/>
+                <a16:creationId xmlns:a16="http://schemas.microsoft.com/office/drawing/2014/main" id="{3B392D86-3FCB-AD2D-5AF8-0F8DF47F3C7C}"/>
               </a:ext>
             </a:extLst>
           </p:cNvPr>
@@ -2634,7 +2634,7 @@
           <a:bodyPr/>
           <a:lstStyle/>
           <a:p>
-            <a:fld id="{C1D8E1FA-081E-4333-8B8D-767F1D810F29}" type="datetimeFigureOut">
+            <a:fld id="{CA11E214-29A8-442E-BC6B-5D970B894DEC}" type="datetimeFigureOut">
               <a:rPr kumimoji="1" lang="ja-JP" altLang="en-US" smtClean="0"/>
               <a:t>2026/7/30</a:t>
             </a:fld>
@@ -2647,7 +2647,7 @@
           <p:cNvPr id="6" name="フッター プレースホルダー 5">
             <a:extLst>
               <a:ext uri="{FF2B5EF4-FFF2-40B4-BE49-F238E27FC236}">
-                <a16:creationId xmlns:a16="http://schemas.microsoft.com/office/drawing/2014/main" id="{F5643B43-B418-4767-1925-7C3B6D5B5FEF}"/>
+                <a16:creationId xmlns:a16="http://schemas.microsoft.com/office/drawing/2014/main" id="{2678CA38-80A5-E986-EF3E-C0F5366F9B96}"/>
               </a:ext>
             </a:extLst>
           </p:cNvPr>
@@ -2672,7 +2672,7 @@
           <p:cNvPr id="7" name="スライド番号プレースホルダー 6">
             <a:extLst>
               <a:ext uri="{FF2B5EF4-FFF2-40B4-BE49-F238E27FC236}">
-                <a16:creationId xmlns:a16="http://schemas.microsoft.com/office/drawing/2014/main" id="{3D67F7E8-D82E-1C15-5C8B-613CFA159164}"/>
+                <a16:creationId xmlns:a16="http://schemas.microsoft.com/office/drawing/2014/main" id="{C3F81071-0AAE-55DA-D21F-8AE2C3B56391}"/>
               </a:ext>
             </a:extLst>
           </p:cNvPr>
@@ -2688,7 +2688,7 @@
           <a:bodyPr/>
           <a:lstStyle/>
           <a:p>
-            <a:fld id="{C333482F-3083-4A41-B1CB-E251E255648A}" type="slidenum">
+            <a:fld id="{A9A54AD3-59D5-4C20-B285-8F8A94244151}" type="slidenum">
               <a:rPr kumimoji="1" lang="ja-JP" altLang="en-US" smtClean="0"/>
               <a:t>‹#›</a:t>
             </a:fld>
@@ -2699,7 +2699,7 @@
     </p:spTree>
     <p:extLst>
       <p:ext uri="{BB962C8B-B14F-4D97-AF65-F5344CB8AC3E}">
-        <p14:creationId xmlns:p14="http://schemas.microsoft.com/office/powerpoint/2010/main" val="2335466513"/>
+        <p14:creationId xmlns:p14="http://schemas.microsoft.com/office/powerpoint/2010/main" val="1688264539"/>
       </p:ext>
     </p:extLst>
   </p:cSld>
@@ -2731,7 +2731,7 @@
           <p:cNvPr id="2" name="タイトル 1">
             <a:extLst>
               <a:ext uri="{FF2B5EF4-FFF2-40B4-BE49-F238E27FC236}">
-                <a16:creationId xmlns:a16="http://schemas.microsoft.com/office/drawing/2014/main" id="{130F0448-2334-F98B-1978-1C94A6B137D5}"/>
+                <a16:creationId xmlns:a16="http://schemas.microsoft.com/office/drawing/2014/main" id="{F398316C-2B95-65F4-6878-EC795652CCC5}"/>
               </a:ext>
             </a:extLst>
           </p:cNvPr>
@@ -2768,7 +2768,7 @@
           <p:cNvPr id="3" name="図プレースホルダー 2">
             <a:extLst>
               <a:ext uri="{FF2B5EF4-FFF2-40B4-BE49-F238E27FC236}">
-                <a16:creationId xmlns:a16="http://schemas.microsoft.com/office/drawing/2014/main" id="{09981A3A-1D42-44E6-A4A9-36C0BD1AF62F}"/>
+                <a16:creationId xmlns:a16="http://schemas.microsoft.com/office/drawing/2014/main" id="{7548B6F1-C782-DB65-B0FA-93519D6416DF}"/>
               </a:ext>
             </a:extLst>
           </p:cNvPr>
@@ -2835,7 +2835,7 @@
           <p:cNvPr id="4" name="テキスト プレースホルダー 3">
             <a:extLst>
               <a:ext uri="{FF2B5EF4-FFF2-40B4-BE49-F238E27FC236}">
-                <a16:creationId xmlns:a16="http://schemas.microsoft.com/office/drawing/2014/main" id="{B3EB6A5E-C391-A3FE-4A63-38A660EE41B8}"/>
+                <a16:creationId xmlns:a16="http://schemas.microsoft.com/office/drawing/2014/main" id="{7E1F5E57-7C7A-2DDD-7FD8-409319674D24}"/>
               </a:ext>
             </a:extLst>
           </p:cNvPr>
@@ -2906,7 +2906,7 @@
           <p:cNvPr id="5" name="日付プレースホルダー 4">
             <a:extLst>
               <a:ext uri="{FF2B5EF4-FFF2-40B4-BE49-F238E27FC236}">
-                <a16:creationId xmlns:a16="http://schemas.microsoft.com/office/drawing/2014/main" id="{B6ACF392-D8FF-CF3A-449F-2A6347C655BB}"/>
+                <a16:creationId xmlns:a16="http://schemas.microsoft.com/office/drawing/2014/main" id="{D1B14287-130B-B96A-F218-FDB76F493A7B}"/>
               </a:ext>
             </a:extLst>
           </p:cNvPr>
@@ -2922,7 +2922,7 @@
           <a:bodyPr/>
           <a:lstStyle/>
           <a:p>
-            <a:fld id="{C1D8E1FA-081E-4333-8B8D-767F1D810F29}" type="datetimeFigureOut">
+            <a:fld id="{CA11E214-29A8-442E-BC6B-5D970B894DEC}" type="datetimeFigureOut">
               <a:rPr kumimoji="1" lang="ja-JP" altLang="en-US" smtClean="0"/>
               <a:t>2026/7/30</a:t>
             </a:fld>
@@ -2935,7 +2935,7 @@
           <p:cNvPr id="6" name="フッター プレースホルダー 5">
             <a:extLst>
               <a:ext uri="{FF2B5EF4-FFF2-40B4-BE49-F238E27FC236}">
-                <a16:creationId xmlns:a16="http://schemas.microsoft.com/office/drawing/2014/main" id="{F5A8241B-266A-14F6-4086-7488935B2146}"/>
+                <a16:creationId xmlns:a16="http://schemas.microsoft.com/office/drawing/2014/main" id="{BDD9BACD-352B-8233-8843-9179927D03A3}"/>
               </a:ext>
             </a:extLst>
           </p:cNvPr>
@@ -2960,7 +2960,7 @@
           <p:cNvPr id="7" name="スライド番号プレースホルダー 6">
             <a:extLst>
               <a:ext uri="{FF2B5EF4-FFF2-40B4-BE49-F238E27FC236}">
-                <a16:creationId xmlns:a16="http://schemas.microsoft.com/office/drawing/2014/main" id="{4DBC105C-E2E7-C2B0-EAB6-A40FD47919B3}"/>
+                <a16:creationId xmlns:a16="http://schemas.microsoft.com/office/drawing/2014/main" id="{7AC5501F-757A-9516-C509-E8A0435A826B}"/>
               </a:ext>
             </a:extLst>
           </p:cNvPr>
@@ -2976,7 +2976,7 @@
           <a:bodyPr/>
           <a:lstStyle/>
           <a:p>
-            <a:fld id="{C333482F-3083-4A41-B1CB-E251E255648A}" type="slidenum">
+            <a:fld id="{A9A54AD3-59D5-4C20-B285-8F8A94244151}" type="slidenum">
               <a:rPr kumimoji="1" lang="ja-JP" altLang="en-US" smtClean="0"/>
               <a:t>‹#›</a:t>
             </a:fld>
@@ -2987,7 +2987,7 @@
     </p:spTree>
     <p:extLst>
       <p:ext uri="{BB962C8B-B14F-4D97-AF65-F5344CB8AC3E}">
-        <p14:creationId xmlns:p14="http://schemas.microsoft.com/office/powerpoint/2010/main" val="1503989155"/>
+        <p14:creationId xmlns:p14="http://schemas.microsoft.com/office/powerpoint/2010/main" val="3039186672"/>
       </p:ext>
     </p:extLst>
   </p:cSld>
@@ -3024,7 +3024,7 @@
           <p:cNvPr id="2" name="タイトル プレースホルダー 1">
             <a:extLst>
               <a:ext uri="{FF2B5EF4-FFF2-40B4-BE49-F238E27FC236}">
-                <a16:creationId xmlns:a16="http://schemas.microsoft.com/office/drawing/2014/main" id="{C94B3D8D-3848-676A-A28E-FFCEE9F9EC43}"/>
+                <a16:creationId xmlns:a16="http://schemas.microsoft.com/office/drawing/2014/main" id="{50F8D335-1602-22EA-023E-4C41079E8495}"/>
               </a:ext>
             </a:extLst>
           </p:cNvPr>
@@ -3062,7 +3062,7 @@
           <p:cNvPr id="3" name="テキスト プレースホルダー 2">
             <a:extLst>
               <a:ext uri="{FF2B5EF4-FFF2-40B4-BE49-F238E27FC236}">
-                <a16:creationId xmlns:a16="http://schemas.microsoft.com/office/drawing/2014/main" id="{57233093-4C4E-3F21-0AA1-B83A991C80DC}"/>
+                <a16:creationId xmlns:a16="http://schemas.microsoft.com/office/drawing/2014/main" id="{C7FD9C1D-7C97-E8FB-D000-5F7AC781D269}"/>
               </a:ext>
             </a:extLst>
           </p:cNvPr>
@@ -3161,7 +3161,7 @@
           <p:cNvPr id="4" name="日付プレースホルダー 3">
             <a:extLst>
               <a:ext uri="{FF2B5EF4-FFF2-40B4-BE49-F238E27FC236}">
-                <a16:creationId xmlns:a16="http://schemas.microsoft.com/office/drawing/2014/main" id="{B6551599-0337-C9D1-BBB1-552BC6392494}"/>
+                <a16:creationId xmlns:a16="http://schemas.microsoft.com/office/drawing/2014/main" id="{2D654F8F-4A90-6FB7-3AD4-35CFC865815F}"/>
               </a:ext>
             </a:extLst>
           </p:cNvPr>
@@ -3195,7 +3195,7 @@
             </a:lvl1pPr>
           </a:lstStyle>
           <a:p>
-            <a:fld id="{C1D8E1FA-081E-4333-8B8D-767F1D810F29}" type="datetimeFigureOut">
+            <a:fld id="{CA11E214-29A8-442E-BC6B-5D970B894DEC}" type="datetimeFigureOut">
               <a:rPr kumimoji="1" lang="ja-JP" altLang="en-US" smtClean="0"/>
               <a:t>2026/7/30</a:t>
             </a:fld>
@@ -3208,7 +3208,7 @@
           <p:cNvPr id="5" name="フッター プレースホルダー 4">
             <a:extLst>
               <a:ext uri="{FF2B5EF4-FFF2-40B4-BE49-F238E27FC236}">
-                <a16:creationId xmlns:a16="http://schemas.microsoft.com/office/drawing/2014/main" id="{2C35B371-5861-B0C0-72DB-3EE8C80054C4}"/>
+                <a16:creationId xmlns:a16="http://schemas.microsoft.com/office/drawing/2014/main" id="{D6CC7AE4-08CB-4F07-CC1B-7443041F6099}"/>
               </a:ext>
             </a:extLst>
           </p:cNvPr>
@@ -3251,7 +3251,7 @@
           <p:cNvPr id="6" name="スライド番号プレースホルダー 5">
             <a:extLst>
               <a:ext uri="{FF2B5EF4-FFF2-40B4-BE49-F238E27FC236}">
-                <a16:creationId xmlns:a16="http://schemas.microsoft.com/office/drawing/2014/main" id="{7BCCE2FA-26B1-3229-C24A-8B64742454E5}"/>
+                <a16:creationId xmlns:a16="http://schemas.microsoft.com/office/drawing/2014/main" id="{F195DB0C-51B3-700A-E0D1-DABCC03AB2BF}"/>
               </a:ext>
             </a:extLst>
           </p:cNvPr>
@@ -3285,7 +3285,7 @@
             </a:lvl1pPr>
           </a:lstStyle>
           <a:p>
-            <a:fld id="{C333482F-3083-4A41-B1CB-E251E255648A}" type="slidenum">
+            <a:fld id="{A9A54AD3-59D5-4C20-B285-8F8A94244151}" type="slidenum">
               <a:rPr kumimoji="1" lang="ja-JP" altLang="en-US" smtClean="0"/>
               <a:t>‹#›</a:t>
             </a:fld>
@@ -3296,7 +3296,7 @@
     </p:spTree>
     <p:extLst>
       <p:ext uri="{BB962C8B-B14F-4D97-AF65-F5344CB8AC3E}">
-        <p14:creationId xmlns:p14="http://schemas.microsoft.com/office/powerpoint/2010/main" val="3748097371"/>
+        <p14:creationId xmlns:p14="http://schemas.microsoft.com/office/powerpoint/2010/main" val="1978875582"/>
       </p:ext>
     </p:extLst>
   </p:cSld>
@@ -3619,7 +3619,7 @@
           <p:cNvPr id="2" name="テキスト ボックス 1">
             <a:extLst>
               <a:ext uri="{FF2B5EF4-FFF2-40B4-BE49-F238E27FC236}">
-                <a16:creationId xmlns:a16="http://schemas.microsoft.com/office/drawing/2014/main" id="{ED2A5645-5C04-74CC-182B-936CE4F97B55}"/>
+                <a16:creationId xmlns:a16="http://schemas.microsoft.com/office/drawing/2014/main" id="{185DB7F9-444E-01DF-5EF0-334609F327DB}"/>
               </a:ext>
             </a:extLst>
           </p:cNvPr>
@@ -3665,7 +3665,7 @@
           <p:cNvPr id="3" name="テキスト ボックス 2">
             <a:extLst>
               <a:ext uri="{FF2B5EF4-FFF2-40B4-BE49-F238E27FC236}">
-                <a16:creationId xmlns:a16="http://schemas.microsoft.com/office/drawing/2014/main" id="{59E0141C-8873-EC7A-43DD-7856564421DC}"/>
+                <a16:creationId xmlns:a16="http://schemas.microsoft.com/office/drawing/2014/main" id="{6B6EDE9C-D64A-47C5-2CE8-9F60F43CFBB2}"/>
               </a:ext>
             </a:extLst>
           </p:cNvPr>
@@ -3714,7 +3714,7 @@
           <p:cNvPr id="4" name="テキスト ボックス 3">
             <a:extLst>
               <a:ext uri="{FF2B5EF4-FFF2-40B4-BE49-F238E27FC236}">
-                <a16:creationId xmlns:a16="http://schemas.microsoft.com/office/drawing/2014/main" id="{40880E91-D3F1-8074-C719-1C958635F6EC}"/>
+                <a16:creationId xmlns:a16="http://schemas.microsoft.com/office/drawing/2014/main" id="{6B18AFD1-F64D-6ABF-B876-B125B2797B6D}"/>
               </a:ext>
             </a:extLst>
           </p:cNvPr>
@@ -3754,7 +3754,7 @@
           <p:cNvPr id="5" name="テキスト ボックス 4">
             <a:extLst>
               <a:ext uri="{FF2B5EF4-FFF2-40B4-BE49-F238E27FC236}">
-                <a16:creationId xmlns:a16="http://schemas.microsoft.com/office/drawing/2014/main" id="{D0D9B0A2-590A-6C39-41DD-3AEDD6CD1315}"/>
+                <a16:creationId xmlns:a16="http://schemas.microsoft.com/office/drawing/2014/main" id="{EC5E7548-6AA8-2988-0955-E2B6882B266F}"/>
               </a:ext>
             </a:extLst>
           </p:cNvPr>
@@ -3801,7 +3801,7 @@
             <a:hlinkClick r:id="" action="ppaction://media"/>
             <a:extLst>
               <a:ext uri="{FF2B5EF4-FFF2-40B4-BE49-F238E27FC236}">
-                <a16:creationId xmlns:a16="http://schemas.microsoft.com/office/drawing/2014/main" id="{3E92A40D-E466-A38B-5335-E620F342528D}"/>
+                <a16:creationId xmlns:a16="http://schemas.microsoft.com/office/drawing/2014/main" id="{660ED6BE-111A-7BB5-AAE3-0D6401DC73B5}"/>
               </a:ext>
             </a:extLst>
           </p:cNvPr>
@@ -3836,7 +3836,7 @@
     </p:spTree>
     <p:extLst>
       <p:ext uri="{BB962C8B-B14F-4D97-AF65-F5344CB8AC3E}">
-        <p14:creationId xmlns:p14="http://schemas.microsoft.com/office/powerpoint/2010/main" val="1122741413"/>
+        <p14:creationId xmlns:p14="http://schemas.microsoft.com/office/powerpoint/2010/main" val="3449671283"/>
       </p:ext>
     </p:extLst>
   </p:cSld>
@@ -3960,7 +3960,7 @@
           <p:cNvPr id="2" name="テキスト ボックス 1">
             <a:extLst>
               <a:ext uri="{FF2B5EF4-FFF2-40B4-BE49-F238E27FC236}">
-                <a16:creationId xmlns:a16="http://schemas.microsoft.com/office/drawing/2014/main" id="{3453FF98-1CF0-0E43-BD8A-E583D8DBAEED}"/>
+                <a16:creationId xmlns:a16="http://schemas.microsoft.com/office/drawing/2014/main" id="{6E4E05F6-A3B0-73FB-70F7-B80EAB580282}"/>
               </a:ext>
             </a:extLst>
           </p:cNvPr>
@@ -4006,7 +4006,7 @@
           <p:cNvPr id="3" name="テキスト ボックス 2">
             <a:extLst>
               <a:ext uri="{FF2B5EF4-FFF2-40B4-BE49-F238E27FC236}">
-                <a16:creationId xmlns:a16="http://schemas.microsoft.com/office/drawing/2014/main" id="{54004390-0DF6-5FA2-FBDB-ADAE4C006170}"/>
+                <a16:creationId xmlns:a16="http://schemas.microsoft.com/office/drawing/2014/main" id="{D5041150-5659-9B97-192D-EE3E58C6F9EA}"/>
               </a:ext>
             </a:extLst>
           </p:cNvPr>
@@ -4046,7 +4046,7 @@
           <p:cNvPr id="4" name="テキスト ボックス 3">
             <a:extLst>
               <a:ext uri="{FF2B5EF4-FFF2-40B4-BE49-F238E27FC236}">
-                <a16:creationId xmlns:a16="http://schemas.microsoft.com/office/drawing/2014/main" id="{7639E92B-5FD9-2698-E609-AA9DE0F3ABC9}"/>
+                <a16:creationId xmlns:a16="http://schemas.microsoft.com/office/drawing/2014/main" id="{AE32AE90-15E8-4B97-15FB-D2ABCF6EA3A0}"/>
               </a:ext>
             </a:extLst>
           </p:cNvPr>
@@ -4113,7 +4113,7 @@
           <p:cNvPr id="5" name="テキスト ボックス 4">
             <a:extLst>
               <a:ext uri="{FF2B5EF4-FFF2-40B4-BE49-F238E27FC236}">
-                <a16:creationId xmlns:a16="http://schemas.microsoft.com/office/drawing/2014/main" id="{FA316E41-981C-8F78-96F2-C8745965FF57}"/>
+                <a16:creationId xmlns:a16="http://schemas.microsoft.com/office/drawing/2014/main" id="{F648EB6A-A481-C5BE-A178-BE42DBC7EEDF}"/>
               </a:ext>
             </a:extLst>
           </p:cNvPr>
@@ -4160,7 +4160,7 @@
             <a:hlinkClick r:id="" action="ppaction://media"/>
             <a:extLst>
               <a:ext uri="{FF2B5EF4-FFF2-40B4-BE49-F238E27FC236}">
-                <a16:creationId xmlns:a16="http://schemas.microsoft.com/office/drawing/2014/main" id="{E72EC7C5-A834-FE5B-D99F-DB323702FE07}"/>
+                <a16:creationId xmlns:a16="http://schemas.microsoft.com/office/drawing/2014/main" id="{4A1C8E7E-4EA7-E1B1-B320-FFF46F2C3768}"/>
               </a:ext>
             </a:extLst>
           </p:cNvPr>
@@ -4195,7 +4195,7 @@
     </p:spTree>
     <p:extLst>
       <p:ext uri="{BB962C8B-B14F-4D97-AF65-F5344CB8AC3E}">
-        <p14:creationId xmlns:p14="http://schemas.microsoft.com/office/powerpoint/2010/main" val="1606973751"/>
+        <p14:creationId xmlns:p14="http://schemas.microsoft.com/office/powerpoint/2010/main" val="2738214323"/>
       </p:ext>
     </p:extLst>
   </p:cSld>
@@ -4319,7 +4319,7 @@
           <p:cNvPr id="2" name="テキスト ボックス 1">
             <a:extLst>
               <a:ext uri="{FF2B5EF4-FFF2-40B4-BE49-F238E27FC236}">
-                <a16:creationId xmlns:a16="http://schemas.microsoft.com/office/drawing/2014/main" id="{5D9A2074-B40F-6657-1AA9-96B5F776E97E}"/>
+                <a16:creationId xmlns:a16="http://schemas.microsoft.com/office/drawing/2014/main" id="{1D5E5499-6A52-9830-6292-B715FDA37956}"/>
               </a:ext>
             </a:extLst>
           </p:cNvPr>
@@ -4365,7 +4365,7 @@
           <p:cNvPr id="3" name="テキスト ボックス 2">
             <a:extLst>
               <a:ext uri="{FF2B5EF4-FFF2-40B4-BE49-F238E27FC236}">
-                <a16:creationId xmlns:a16="http://schemas.microsoft.com/office/drawing/2014/main" id="{C3D66C32-D0C8-19F0-BF94-4C94842A95A5}"/>
+                <a16:creationId xmlns:a16="http://schemas.microsoft.com/office/drawing/2014/main" id="{DB886FD7-F81A-A2EE-E22F-CE7D1BD9A6D5}"/>
               </a:ext>
             </a:extLst>
           </p:cNvPr>
@@ -4405,7 +4405,7 @@
           <p:cNvPr id="4" name="テキスト ボックス 3">
             <a:extLst>
               <a:ext uri="{FF2B5EF4-FFF2-40B4-BE49-F238E27FC236}">
-                <a16:creationId xmlns:a16="http://schemas.microsoft.com/office/drawing/2014/main" id="{4329A242-1915-EB4C-576C-4EF08C6D04F6}"/>
+                <a16:creationId xmlns:a16="http://schemas.microsoft.com/office/drawing/2014/main" id="{424A0145-058B-FBA8-DBC4-9E2EBCD03352}"/>
               </a:ext>
             </a:extLst>
           </p:cNvPr>
@@ -4500,7 +4500,7 @@
           <p:cNvPr id="5" name="テキスト ボックス 4">
             <a:extLst>
               <a:ext uri="{FF2B5EF4-FFF2-40B4-BE49-F238E27FC236}">
-                <a16:creationId xmlns:a16="http://schemas.microsoft.com/office/drawing/2014/main" id="{CB838DF2-3646-E2E0-CA80-567C1558F888}"/>
+                <a16:creationId xmlns:a16="http://schemas.microsoft.com/office/drawing/2014/main" id="{60BD7F26-35BE-9323-A84C-F7BFB2A0D6E1}"/>
               </a:ext>
             </a:extLst>
           </p:cNvPr>
@@ -4547,7 +4547,7 @@
             <a:hlinkClick r:id="" action="ppaction://media"/>
             <a:extLst>
               <a:ext uri="{FF2B5EF4-FFF2-40B4-BE49-F238E27FC236}">
-                <a16:creationId xmlns:a16="http://schemas.microsoft.com/office/drawing/2014/main" id="{DCEDA5B0-931A-8974-C94A-0561D27588DA}"/>
+                <a16:creationId xmlns:a16="http://schemas.microsoft.com/office/drawing/2014/main" id="{293DD1FA-2E3D-FB8F-1D5D-BD79F3043F49}"/>
               </a:ext>
             </a:extLst>
           </p:cNvPr>
@@ -4582,7 +4582,7 @@
     </p:spTree>
     <p:extLst>
       <p:ext uri="{BB962C8B-B14F-4D97-AF65-F5344CB8AC3E}">
-        <p14:creationId xmlns:p14="http://schemas.microsoft.com/office/powerpoint/2010/main" val="254505516"/>
+        <p14:creationId xmlns:p14="http://schemas.microsoft.com/office/powerpoint/2010/main" val="2923100660"/>
       </p:ext>
     </p:extLst>
   </p:cSld>
@@ -4706,7 +4706,7 @@
           <p:cNvPr id="2" name="テキスト ボックス 1">
             <a:extLst>
               <a:ext uri="{FF2B5EF4-FFF2-40B4-BE49-F238E27FC236}">
-                <a16:creationId xmlns:a16="http://schemas.microsoft.com/office/drawing/2014/main" id="{E4E248E2-1391-22A5-0F4F-47E3962B66B6}"/>
+                <a16:creationId xmlns:a16="http://schemas.microsoft.com/office/drawing/2014/main" id="{28F7B131-4B72-A953-157F-4DC3035002CF}"/>
               </a:ext>
             </a:extLst>
           </p:cNvPr>
@@ -4752,7 +4752,7 @@
           <p:cNvPr id="3" name="テキスト ボックス 2">
             <a:extLst>
               <a:ext uri="{FF2B5EF4-FFF2-40B4-BE49-F238E27FC236}">
-                <a16:creationId xmlns:a16="http://schemas.microsoft.com/office/drawing/2014/main" id="{025DB67F-B628-AFF9-501D-4DB55B394604}"/>
+                <a16:creationId xmlns:a16="http://schemas.microsoft.com/office/drawing/2014/main" id="{6DCD8383-7421-93D7-298B-0859BD07BE06}"/>
               </a:ext>
             </a:extLst>
           </p:cNvPr>
@@ -4792,7 +4792,7 @@
           <p:cNvPr id="4" name="テキスト ボックス 3">
             <a:extLst>
               <a:ext uri="{FF2B5EF4-FFF2-40B4-BE49-F238E27FC236}">
-                <a16:creationId xmlns:a16="http://schemas.microsoft.com/office/drawing/2014/main" id="{262BD503-9C50-BA8F-F0EC-771B9E9ACDFB}"/>
+                <a16:creationId xmlns:a16="http://schemas.microsoft.com/office/drawing/2014/main" id="{5584788D-6CE4-76CB-96F3-BDEF2278BB27}"/>
               </a:ext>
             </a:extLst>
           </p:cNvPr>
@@ -4902,7 +4902,7 @@
           <p:cNvPr id="5" name="テキスト ボックス 4">
             <a:extLst>
               <a:ext uri="{FF2B5EF4-FFF2-40B4-BE49-F238E27FC236}">
-                <a16:creationId xmlns:a16="http://schemas.microsoft.com/office/drawing/2014/main" id="{C712BE8B-EA16-1BAC-0B71-438FFCFF4897}"/>
+                <a16:creationId xmlns:a16="http://schemas.microsoft.com/office/drawing/2014/main" id="{1D2925FD-A195-E695-2FFC-BD423FAB00F8}"/>
               </a:ext>
             </a:extLst>
           </p:cNvPr>
@@ -4949,7 +4949,7 @@
             <a:hlinkClick r:id="" action="ppaction://media"/>
             <a:extLst>
               <a:ext uri="{FF2B5EF4-FFF2-40B4-BE49-F238E27FC236}">
-                <a16:creationId xmlns:a16="http://schemas.microsoft.com/office/drawing/2014/main" id="{CE4DA914-F823-1F8E-A7A1-5825A2582D50}"/>
+                <a16:creationId xmlns:a16="http://schemas.microsoft.com/office/drawing/2014/main" id="{D94B75C6-D817-99BC-421F-3C106A8029B3}"/>
               </a:ext>
             </a:extLst>
           </p:cNvPr>
@@ -4984,7 +4984,7 @@
     </p:spTree>
     <p:extLst>
       <p:ext uri="{BB962C8B-B14F-4D97-AF65-F5344CB8AC3E}">
-        <p14:creationId xmlns:p14="http://schemas.microsoft.com/office/powerpoint/2010/main" val="606862720"/>
+        <p14:creationId xmlns:p14="http://schemas.microsoft.com/office/powerpoint/2010/main" val="3453057707"/>
       </p:ext>
     </p:extLst>
   </p:cSld>
@@ -5108,7 +5108,7 @@
           <p:cNvPr id="2" name="テキスト ボックス 1">
             <a:extLst>
               <a:ext uri="{FF2B5EF4-FFF2-40B4-BE49-F238E27FC236}">
-                <a16:creationId xmlns:a16="http://schemas.microsoft.com/office/drawing/2014/main" id="{BE6FB362-3B00-3243-0EF4-2A616838D27B}"/>
+                <a16:creationId xmlns:a16="http://schemas.microsoft.com/office/drawing/2014/main" id="{60CAB5DE-F03A-4CCA-85FD-16DFF591EA91}"/>
               </a:ext>
             </a:extLst>
           </p:cNvPr>
@@ -5154,7 +5154,7 @@
           <p:cNvPr id="3" name="テキスト ボックス 2">
             <a:extLst>
               <a:ext uri="{FF2B5EF4-FFF2-40B4-BE49-F238E27FC236}">
-                <a16:creationId xmlns:a16="http://schemas.microsoft.com/office/drawing/2014/main" id="{A64553CD-91AC-169A-2C59-A623A41BBF0C}"/>
+                <a16:creationId xmlns:a16="http://schemas.microsoft.com/office/drawing/2014/main" id="{66FE39D4-1806-5D8A-AE11-F1DC7FFB40C8}"/>
               </a:ext>
             </a:extLst>
           </p:cNvPr>
@@ -5194,7 +5194,7 @@
           <p:cNvPr id="4" name="テキスト ボックス 3">
             <a:extLst>
               <a:ext uri="{FF2B5EF4-FFF2-40B4-BE49-F238E27FC236}">
-                <a16:creationId xmlns:a16="http://schemas.microsoft.com/office/drawing/2014/main" id="{54AE608B-C86E-D1ED-5485-4483C7685091}"/>
+                <a16:creationId xmlns:a16="http://schemas.microsoft.com/office/drawing/2014/main" id="{09CF5DCD-20E8-9102-00BA-5CD56A70ECFE}"/>
               </a:ext>
             </a:extLst>
           </p:cNvPr>
@@ -5218,20 +5218,14 @@
           <a:lstStyle/>
           <a:p>
             <a:r>
-              <a:rPr kumimoji="1" lang="en-US" altLang="ja-JP" sz="2000">
+              <a:rPr kumimoji="1" lang="ja-JP" altLang="en-US" sz="2000">
                 <a:solidFill>
                   <a:srgbClr val="333333"/>
                 </a:solidFill>
                 <a:latin typeface="Arial" panose="020B0604020202020204" pitchFamily="34" charset="0"/>
               </a:rPr>
-              <a:t>Set ComicStay domain metadata</a:t>
-            </a:r>
-            <a:endParaRPr kumimoji="1" lang="ja-JP" altLang="en-US" sz="2000">
-              <a:solidFill>
-                <a:srgbClr val="333333"/>
-              </a:solidFill>
-              <a:latin typeface="Arial" panose="020B0604020202020204" pitchFamily="34" charset="0"/>
-            </a:endParaRPr>
+              <a:t>直近のコミットでは、実装の見直しと継続的な改善が行われました。</a:t>
+            </a:r>
           </a:p>
         </p:txBody>
       </p:sp>
@@ -5240,7 +5234,7 @@
           <p:cNvPr id="5" name="テキスト ボックス 4">
             <a:extLst>
               <a:ext uri="{FF2B5EF4-FFF2-40B4-BE49-F238E27FC236}">
-                <a16:creationId xmlns:a16="http://schemas.microsoft.com/office/drawing/2014/main" id="{A476703F-583C-2605-F34E-1214A05227A1}"/>
+                <a16:creationId xmlns:a16="http://schemas.microsoft.com/office/drawing/2014/main" id="{F36B2A93-5CCB-0AD0-A364-5DABF5791F0E}"/>
               </a:ext>
             </a:extLst>
           </p:cNvPr>
@@ -5287,7 +5281,7 @@
             <a:hlinkClick r:id="" action="ppaction://media"/>
             <a:extLst>
               <a:ext uri="{FF2B5EF4-FFF2-40B4-BE49-F238E27FC236}">
-                <a16:creationId xmlns:a16="http://schemas.microsoft.com/office/drawing/2014/main" id="{7E3B19BB-4195-B4B4-8BAB-D1807DA1C15C}"/>
+                <a16:creationId xmlns:a16="http://schemas.microsoft.com/office/drawing/2014/main" id="{41254EEC-4DD4-152F-DB77-088A98A0970C}"/>
               </a:ext>
             </a:extLst>
           </p:cNvPr>
@@ -5322,7 +5316,7 @@
     </p:spTree>
     <p:extLst>
       <p:ext uri="{BB962C8B-B14F-4D97-AF65-F5344CB8AC3E}">
-        <p14:creationId xmlns:p14="http://schemas.microsoft.com/office/powerpoint/2010/main" val="1671365231"/>
+        <p14:creationId xmlns:p14="http://schemas.microsoft.com/office/powerpoint/2010/main" val="60182623"/>
       </p:ext>
     </p:extLst>
   </p:cSld>
@@ -5365,7 +5359,7 @@
                                   <p:childTnLst>
                                     <p:cmd type="call" cmd="playFrom(0.0)">
                                       <p:cBhvr>
-                                        <p:cTn id="6" dur="6461" fill="hold"/>
+                                        <p:cTn id="6" dur="6076" fill="hold"/>
                                         <p:tgtEl>
                                           <p:spTgt spid="6"/>
                                         </p:tgtEl>
@@ -5446,7 +5440,7 @@
           <p:cNvPr id="2" name="テキスト ボックス 1">
             <a:extLst>
               <a:ext uri="{FF2B5EF4-FFF2-40B4-BE49-F238E27FC236}">
-                <a16:creationId xmlns:a16="http://schemas.microsoft.com/office/drawing/2014/main" id="{8AEC338F-95AF-8EDE-0C8C-489E7FEC05CB}"/>
+                <a16:creationId xmlns:a16="http://schemas.microsoft.com/office/drawing/2014/main" id="{25279B1F-9424-C743-082E-D64BA03A5A49}"/>
               </a:ext>
             </a:extLst>
           </p:cNvPr>
@@ -5492,7 +5486,7 @@
           <p:cNvPr id="3" name="テキスト ボックス 2">
             <a:extLst>
               <a:ext uri="{FF2B5EF4-FFF2-40B4-BE49-F238E27FC236}">
-                <a16:creationId xmlns:a16="http://schemas.microsoft.com/office/drawing/2014/main" id="{039D94BA-E747-E717-AB8D-38A6CE3A41BA}"/>
+                <a16:creationId xmlns:a16="http://schemas.microsoft.com/office/drawing/2014/main" id="{C1C0FF64-C3D0-1314-4DE2-307D38192136}"/>
               </a:ext>
             </a:extLst>
           </p:cNvPr>
@@ -5532,7 +5526,7 @@
           <p:cNvPr id="4" name="テキスト ボックス 3">
             <a:extLst>
               <a:ext uri="{FF2B5EF4-FFF2-40B4-BE49-F238E27FC236}">
-                <a16:creationId xmlns:a16="http://schemas.microsoft.com/office/drawing/2014/main" id="{4CCA5616-2ED6-BBA8-EE31-1070C2A7D594}"/>
+                <a16:creationId xmlns:a16="http://schemas.microsoft.com/office/drawing/2014/main" id="{ABA3F22B-B481-9792-5028-CC4D51DEB603}"/>
               </a:ext>
             </a:extLst>
           </p:cNvPr>
@@ -5597,7 +5591,7 @@
           <p:cNvPr id="5" name="テキスト ボックス 4">
             <a:extLst>
               <a:ext uri="{FF2B5EF4-FFF2-40B4-BE49-F238E27FC236}">
-                <a16:creationId xmlns:a16="http://schemas.microsoft.com/office/drawing/2014/main" id="{A2059995-6EA6-7D7C-ED79-7E54EBF7C786}"/>
+                <a16:creationId xmlns:a16="http://schemas.microsoft.com/office/drawing/2014/main" id="{6529E742-6A1E-B2E5-F36C-51014484C37E}"/>
               </a:ext>
             </a:extLst>
           </p:cNvPr>
@@ -5644,7 +5638,7 @@
             <a:hlinkClick r:id="" action="ppaction://media"/>
             <a:extLst>
               <a:ext uri="{FF2B5EF4-FFF2-40B4-BE49-F238E27FC236}">
-                <a16:creationId xmlns:a16="http://schemas.microsoft.com/office/drawing/2014/main" id="{0A6CB931-3C2B-847F-A376-E5DCD56AD8AF}"/>
+                <a16:creationId xmlns:a16="http://schemas.microsoft.com/office/drawing/2014/main" id="{E227D888-99BC-2DA8-C64B-912C9708F7D3}"/>
               </a:ext>
             </a:extLst>
           </p:cNvPr>
@@ -5679,7 +5673,7 @@
     </p:spTree>
     <p:extLst>
       <p:ext uri="{BB962C8B-B14F-4D97-AF65-F5344CB8AC3E}">
-        <p14:creationId xmlns:p14="http://schemas.microsoft.com/office/powerpoint/2010/main" val="392345436"/>
+        <p14:creationId xmlns:p14="http://schemas.microsoft.com/office/powerpoint/2010/main" val="1658579447"/>
       </p:ext>
     </p:extLst>
   </p:cSld>
